--- a/dist/weeks-2학기/서비스디자인_2학기_02주차_GNB컴포넌트.pptx
+++ b/dist/weeks-2학기/서비스디자인_2학기_02주차_GNB컴포넌트.pptx
@@ -518,7 +518,8 @@
           <a:p>
             <a:r>
               <a:rPr lang="en-US" dirty="0"/>
-              <a:t>오늘의 목적은 GNB 하나를 예쁘게 만드는 것이 아니라, '수치가 근거에서 나온다'는 사고방식을 하나의 요소로 끝까지 체험시키는 것이다. 이 방식을 GNB에서 익히면 3주차 이후 모든 컴포넌트에 그대로 적용된다.</a:t>
+              <a:t>[운영 메모]
+오늘의 목적은 GNB 하나를 예쁘게 만드는 것이 아니라, '수치가 근거에서 나온다'는 사고방식을 하나의 요소로 끝까지 체험시키는 것이다. 이 방식을 GNB에서 익히면 3주차 이후 모든 컴포넌트에 그대로 적용된다.</a:t>
             </a:r>
             <a:endParaRPr lang="en-US" dirty="0"/>
           </a:p>
@@ -606,7 +607,8 @@
           <a:p>
             <a:r>
               <a:rPr lang="en-US" dirty="0"/>
-              <a:t>4단계 검산이 오늘 가장 중요한 순간이다. 더해서 안 맞는 학생이 절반이고, 그때 '어디가 임의로 정한 값인지'를 스스로 찾는다.</a:t>
+              <a:t>[운영 메모]
+4단계 검산이 오늘 가장 중요한 순간이다. 더해서 안 맞는 학생이 절반이고, 그때 '어디가 임의로 정한 값인지'를 스스로 찾는다.</a:t>
             </a:r>
             <a:endParaRPr lang="en-US" dirty="0"/>
           </a:p>
@@ -694,7 +696,8 @@
           <a:p>
             <a:r>
               <a:rPr lang="en-US" dirty="0"/>
-              <a:t>30분 구간. 세 장치(배리언트 · 오토레이아웃 · 컴포넌트 프로퍼티)를 화면 공유로 천천히 시연할 것. 여기서 못 따라오면 실습이 통째로 막힌다.</a:t>
+              <a:t>[운영 메모]
+30분 구간. 세 장치(배리언트 · 오토레이아웃 · 컴포넌트 프로퍼티)를 화면 공유로 천천히 시연할 것. 여기서 못 따라오면 실습이 통째로 막힌다.</a:t>
             </a:r>
             <a:endParaRPr lang="en-US" dirty="0"/>
           </a:p>
@@ -782,7 +785,8 @@
           <a:p>
             <a:r>
               <a:rPr lang="en-US" dirty="0"/>
-              <a:t>'Tab Item을 화면에 직접 놓지 않는다'는 규칙을 명시할 것. 이 실수가 나중에 정렬 문제로 돌아온다.</a:t>
+              <a:t>[운영 메모]
+'Tab Item을 화면에 직접 놓지 않는다'는 규칙을 명시할 것. 이 실수가 나중에 정렬 문제로 돌아온다.</a:t>
             </a:r>
             <a:endParaRPr lang="en-US" dirty="0"/>
           </a:p>
@@ -870,7 +874,8 @@
           <a:p>
             <a:r>
               <a:rPr lang="en-US" dirty="0"/>
-              <a:t>컴포넌트 프로퍼티를 처음 쓰는 학생이 많다. 라벨(Text)만이라도 반드시 적용시킬 것 — 나머지는 과제로 넘겨도 된다.</a:t>
+              <a:t>[운영 메모]
+컴포넌트 프로퍼티를 처음 쓰는 학생이 많다. 라벨(Text)만이라도 반드시 적용시킬 것 — 나머지는 과제로 넘겨도 된다.</a:t>
             </a:r>
             <a:endParaRPr lang="en-US" dirty="0"/>
           </a:p>
@@ -958,7 +963,8 @@
           <a:p>
             <a:r>
               <a:rPr lang="en-US" dirty="0"/>
-              <a:t>4단계에서 시간이 모자라는 학생이 대부분이다. 수업에서 최소 5화면까지 적용시키고 나머지는 과제로. 한 번이라도 교체해 봐야 과제로 이어진다.</a:t>
+              <a:t>[운영 메모]
+4단계에서 시간이 모자라는 학생이 대부분이다. 수업에서 최소 5화면까지 적용시키고 나머지는 과제로. 한 번이라도 교체해 봐야 과제로 이어진다.</a:t>
             </a:r>
             <a:endParaRPr lang="en-US" dirty="0"/>
           </a:p>
@@ -1046,7 +1052,8 @@
           <a:p>
             <a:r>
               <a:rPr lang="en-US" dirty="0"/>
-              <a:t>이 검증을 수업 안에서 반드시 시킬 것. 눈으로 본 학생과 설명만 들은 학생의 3주차 작업 속도가 확연히 다르다.</a:t>
+              <a:t>[운영 메모]
+이 검증을 수업 안에서 반드시 시킬 것. 눈으로 본 학생과 설명만 들은 학생의 3주차 작업 속도가 확연히 다르다.</a:t>
             </a:r>
             <a:endParaRPr lang="en-US" dirty="0"/>
           </a:p>
@@ -1134,7 +1141,8 @@
           <a:p>
             <a:r>
               <a:rPr lang="en-US" dirty="0"/>
-              <a:t>체크리스트를 클래스룸 과제 설명에 그대로 복사해 둘 것. 특히 10번을 명시해야 실제로 교체한다.</a:t>
+              <a:t>[운영 메모]
+체크리스트를 클래스룸 과제 설명에 그대로 복사해 둘 것. 특히 10번을 명시해야 실제로 교체한다.</a:t>
             </a:r>
             <a:endParaRPr lang="en-US" dirty="0"/>
           </a:p>
@@ -1222,7 +1230,8 @@
           <a:p>
             <a:r>
               <a:rPr lang="en-US" dirty="0"/>
-              <a:t>2번이 오늘의 실질이다. 컴포넌트만 만들고 화면에 적용하지 않으면 다음 주에도 낱개 화면을 고치고 있게 된다. 클래스룸 과제 설명에 '직접 그린 하단 바가 남아 있으면 미제출로 본다'고 명시할 것.</a:t>
+              <a:t>[운영 메모]
+2번이 오늘의 실질이다. 컴포넌트만 만들고 화면에 적용하지 않으면 다음 주에도 낱개 화면을 고치고 있게 된다. 클래스룸 과제 설명에 '직접 그린 하단 바가 남아 있으면 미제출로 본다'고 명시할 것.</a:t>
             </a:r>
             <a:endParaRPr lang="en-US" dirty="0"/>
           </a:p>
@@ -1310,7 +1319,8 @@
           <a:p>
             <a:r>
               <a:rPr lang="en-US" dirty="0"/>
-              <a:t>첫 15분 실측 공유가 오늘의 동기를 만든다. 같은 하단 바인데 학생마다 높이가 62 · 78 · 83 · 90으로 다르게 나오고, 심지어 한 사람 안에서도 화면마다 다르다. 그 표를 화면에 띄우고 시작하면 이후 설명이 필요 없다.</a:t>
+              <a:t>[운영 메모]
+첫 15분 실측 공유가 오늘의 동기를 만든다. 같은 하단 바인데 학생마다 높이가 62 · 78 · 83 · 90으로 다르게 나오고, 심지어 한 사람 안에서도 화면마다 다르다. 그 표를 화면에 띄우고 시작하면 이후 설명이 필요 없다.</a:t>
             </a:r>
             <a:endParaRPr lang="en-US" dirty="0"/>
           </a:p>
@@ -1398,7 +1408,8 @@
           <a:p>
             <a:r>
               <a:rPr lang="en-US" dirty="0"/>
-              <a:t>네 번째를 수업 끝에 실제로 시연시킬 것. 마스터 컴포넌트 색 하나를 바꿔 12개 화면이 동시에 바뀌는 것을 본인 파일에서 봐야 체득된다.</a:t>
+              <a:t>[운영 메모]
+네 번째를 수업 끝에 실제로 시연시킬 것. 마스터 컴포넌트 색 하나를 바꿔 12개 화면이 동시에 바뀌는 것을 본인 파일에서 봐야 체득된다.</a:t>
             </a:r>
             <a:endParaRPr lang="en-US" dirty="0"/>
           </a:p>
@@ -1486,7 +1497,8 @@
           <a:p>
             <a:r>
               <a:rPr lang="en-US" dirty="0"/>
-              <a:t>35분 구간. 실측표를 먼저 띄우고 '왜 다 다른가'로 시작한다. 답을 주지 말고 물어볼 것.</a:t>
+              <a:t>[운영 메모]
+35분 구간. 실측표를 먼저 띄우고 '왜 다 다른가'로 시작한다. 답을 주지 말고 물어볼 것.</a:t>
             </a:r>
             <a:endParaRPr lang="en-US" dirty="0"/>
           </a:p>
@@ -1574,7 +1586,8 @@
           <a:p>
             <a:r>
               <a:rPr lang="en-US" dirty="0"/>
-              <a:t>이 슬라이드를 실습 내내 화면에 띄워 둔다. 순회하며 '이 값의 근거는요?'만 물으면 된다.</a:t>
+              <a:t>[운영 메모]
+이 슬라이드를 실습 내내 화면에 띄워 둔다. 순회하며 '이 값의 근거는요?'만 물으면 된다.</a:t>
             </a:r>
             <a:endParaRPr lang="en-US" dirty="0"/>
           </a:p>
@@ -1662,7 +1675,8 @@
           <a:p>
             <a:r>
               <a:rPr lang="en-US" dirty="0"/>
-              <a:t>단위 혼동(px vs pt)이 실측표에서 가장 많이 나오는 오류다. 첫 15분에 반드시 정리할 것.</a:t>
+              <a:t>[운영 메모]
+단위 혼동(px vs pt)이 실측표에서 가장 많이 나오는 오류다. 첫 15분에 반드시 정리할 것.</a:t>
             </a:r>
             <a:endParaRPr lang="en-US" dirty="0"/>
           </a:p>
@@ -1750,7 +1764,8 @@
           <a:p>
             <a:r>
               <a:rPr lang="en-US" dirty="0"/>
-              <a:t>'정답이 하나가 아니다'를 반드시 말할 것. 정답을 찾는 문제로 받아들이면 계산 과정을 건너뛰고 숫자만 외운다.</a:t>
+              <a:t>[운영 메모]
+'정답이 하나가 아니다'를 반드시 말할 것. 정답을 찾는 문제로 받아들이면 계산 과정을 건너뛰고 숫자만 외운다.</a:t>
             </a:r>
             <a:endParaRPr lang="en-US" dirty="0"/>
           </a:p>
@@ -1838,7 +1853,8 @@
           <a:p>
             <a:r>
               <a:rPr lang="en-US" dirty="0"/>
-              <a:t>이 표를 인쇄해 나눠 주고 오른쪽 값 칸을 비운 채로 실습시키면 훨씬 잘 따라온다.</a:t>
+              <a:t>[운영 메모]
+이 표를 인쇄해 나눠 주고 오른쪽 값 칸을 비운 채로 실습시키면 훨씬 잘 따라온다.</a:t>
             </a:r>
             <a:endParaRPr lang="en-US" dirty="0"/>
           </a:p>
@@ -1926,7 +1942,8 @@
           <a:p>
             <a:r>
               <a:rPr lang="en-US" dirty="0"/>
-              <a:t>이 슬라이드가 PART 1과 PART 2를 잇는다. '수치를 정한다'에서 '수치가 스스로 계산되게 한다'로 넘어가는 지점.</a:t>
+              <a:t>[운영 메모]
+이 슬라이드가 PART 1과 PART 2를 잇는다. '수치를 정한다'에서 '수치가 스스로 계산되게 한다'로 넘어가는 지점.</a:t>
             </a:r>
             <a:endParaRPr lang="en-US" dirty="0"/>
           </a:p>

--- a/dist/weeks-2학기/서비스디자인_2학기_02주차_GNB컴포넌트.pptx
+++ b/dist/weeks-2학기/서비스디자인_2학기_02주차_GNB컴포넌트.pptx
@@ -518,7 +518,12 @@
           <a:p>
             <a:r>
               <a:rPr lang="en-US" dirty="0"/>
-              <a:t>[운영 메모]
+              <a:t>[말할 내용]
+서비스디자인 두 번째 시간입니다.
+지난주에 각자 뭘 가지고 이번 학기를 시작하는지 확인했고, 공통으로 보이는 문제 다섯 가지를 짚었습니다. 그중 첫 번째와 두 번째 — 화면마다 규격이 다르고, 같은 요소를 여러 번 그렸다 — 를 오늘 함께 풉니다.
+대상은 하단 GNB 하나입니다. 모든 화면에 반복되는 그 바를 수치로 정의하고, 한 번 고치면 전부 바뀌는 컴포넌트로 만드는 데까지 오늘 안에 갑니다.
+오늘 배우는 방식은 GNB에만 쓰는 게 아닙니다. 3주차부터 나머지 공통 요소에 그대로 반복합니다.
+[운영 메모]
 오늘의 목적은 GNB 하나를 예쁘게 만드는 것이 아니라, '수치가 근거에서 나온다'는 사고방식을 하나의 요소로 끝까지 체험시키는 것이다. 이 방식을 GNB에서 익히면 3주차 이후 모든 컴포넌트에 그대로 적용된다.</a:t>
             </a:r>
             <a:endParaRPr lang="en-US" dirty="0"/>
@@ -607,7 +612,13 @@
           <a:p>
             <a:r>
               <a:rPr lang="en-US" dirty="0"/>
-              <a:t>[운영 메모]
+              <a:t>[말할 내용]
+자, 35분 실습입니다. 아직 Figma에서 만들지 않습니다. 표를 먼저 채웁니다.
+먼저 8분. 화면 폭을 390으로 통일하고 탭 개수를 3에서 5 사이로 확정하세요. 지금 탭이 여섯 개 이상이신 분은 오늘 줄이셔야 합니다.
+다음 12분. 여섯 항목을 채웁니다. 높이, 탭 폭, 아이콘, 라벨, 간격, 구분선. 값과 근거를 함께 쓰세요. 근거를 못 쓰겠으면 그 값을 다시 계산하셔야 한다는 뜻입니다.
+다음 8분. 상태를 정의합니다. 기본과 활성 두 가지요. 색만으로 구분하지 마시고 아이콘을 outline과 fill로 함께 바꾸세요. 색각 이상이신 분도 구분할 수 있어야 합니다.
+마지막 7분이 오늘 제일 중요합니다. 검산이에요. 상단 패딩 더하기 아이콘 더하기 간격 더하기 라벨 더하기 하단 패딩이 콘텐츠 높이와 일치하는지 실제로 더해 보세요. 안 맞으면 어느 값이 근거 없이 정해진 겁니다.
+[운영 메모]
 4단계 검산이 오늘 가장 중요한 순간이다. 더해서 안 맞는 학생이 절반이고, 그때 '어디가 임의로 정한 값인지'를 스스로 찾는다.</a:t>
             </a:r>
             <a:endParaRPr lang="en-US" dirty="0"/>
@@ -696,7 +707,10 @@
           <a:p>
             <a:r>
               <a:rPr lang="en-US" dirty="0"/>
-              <a:t>[운영 메모]
+              <a:t>[말할 내용]
+이제 정한 수치를 컴포넌트에 담습니다.
+한 곳에 담아 두고, 화면에서는 꺼내 쓰기만 하는 구조를 만들 겁니다.
+[운영 메모]
 30분 구간. 세 장치(배리언트 · 오토레이아웃 · 컴포넌트 프로퍼티)를 화면 공유로 천천히 시연할 것. 여기서 못 따라오면 실습이 통째로 막힌다.</a:t>
             </a:r>
             <a:endParaRPr lang="en-US" dirty="0"/>
@@ -785,7 +799,13 @@
           <a:p>
             <a:r>
               <a:rPr lang="en-US" dirty="0"/>
-              <a:t>[운영 메모]
+              <a:t>[말할 내용]
+세 층으로 쌓습니다. 작은 것부터 만들어 올라가요.
+가장 아래가 아이콘과 라벨입니다. 아이콘은 24 프레임 안에 정렬해서 컴포넌트로 만들고, 라벨은 텍스트 스타일로 등록합니다. 여기까지는 GNB 전용이 아니에요. 다른 데도 씁니다.
+가운데가 Tab Item입니다. 아이콘 더하기 라벨 더하기 상태를 묶은 단위인데, 오늘 만드는 것 중 제일 중요합니다. 세로 오토레이아웃, 간격 4, 패딩은 위 6 아래 8.
+맨 위가 GNB입니다. Tab Item 인스턴스 서너 개에 배경, 상단 구분선, 안전 영역 스페이서를 더한 거예요. 가로 오토레이아웃이고 각 아이템은 Fill container입니다.
+화면에 붙이는 건 세 번째뿐입니다. Tab Item을 화면에 직접 놓지 마세요. 그러면 GNB가 화면마다 조금씩 달라집니다.
+[운영 메모]
 'Tab Item을 화면에 직접 놓지 않는다'는 규칙을 명시할 것. 이 실수가 나중에 정렬 문제로 돌아온다.</a:t>
             </a:r>
             <a:endParaRPr lang="en-US" dirty="0"/>
@@ -874,7 +894,13 @@
           <a:p>
             <a:r>
               <a:rPr lang="en-US" dirty="0"/>
-              <a:t>[운영 메모]
+              <a:t>[말할 내용]
+Figma에서 쓸 장치가 세 가지입니다. 이 셋을 쓰면 값을 다시 입력할 일이 없어집니다.
+첫째 오토레이아웃. 간격을 규칙으로 만듭니다. Tab Item은 세로에 간격 4, 패딩 6과 8. GNB는 가로에 각 아이템 Fill container. 이러면 탭을 늘리거나 화면 폭이 바뀌어도 자동으로 재분배됩니다. 아까 그 97.5를 손으로 계산할 일이 없어져요.
+둘째 배리언트. Tab Item에 State를 Default와 Active 두 개로 만듭니다. 인스턴스에서 드롭다운으로 전환하면 되니까, 화면마다 어느 탭이 활성인지만 바꾸면 됩니다.
+셋째 컴포넌트 프로퍼티. 라벨은 Text property, 아이콘은 Instance swap, 배지는 Boolean으로 노출합니다. 그러면 Tab Item 컴포넌트 하나로 모든 탭을 만들 수 있어요.
+세 장치를 다 쓰면 마스터 컴포넌트는 단 하나입니다. 탭이 네 개여도 컴포넌트는 하나, 인스턴스가 네 개인 거죠.
+[운영 메모]
 컴포넌트 프로퍼티를 처음 쓰는 학생이 많다. 라벨(Text)만이라도 반드시 적용시킬 것 — 나머지는 과제로 넘겨도 된다.</a:t>
             </a:r>
             <a:endParaRPr lang="en-US" dirty="0"/>
@@ -963,7 +989,13 @@
           <a:p>
             <a:r>
               <a:rPr lang="en-US" dirty="0"/>
-              <a:t>[운영 메모]
+              <a:t>[말할 내용]
+40분 실습입니다. 만드는 것보다 화면에 적용하는 게 오늘의 목표입니다.
+먼저 10분. Tab Item을 만듭니다. 아이콘 24, 간격 4, 라벨 11pt를 세로 오토레이아웃으로 묶고 패딩 위 6 아래 8. 컴포넌트로 만드세요.
+다음 8분. State 배리언트 두 개를 만들고 라벨을 Text property로 노출합니다. 프로퍼티가 처음이신 분은 라벨만이라도 해 보세요. 나머지는 과제로 하셔도 됩니다.
+다음 10분. GNB를 조립합니다. Tab Item 인스턴스 네 개를 가로 오토레이아웃에 넣고 각각 Fill container로. 배경 90 높이에 상단 구분선, 하단 34 스페이서까지.
+마지막 12분. 1학기 화면의 하단 바를 전부 지우고 GNB 인스턴스로 교체하세요. 시간이 모자라면 최소 다섯 화면까지는 하시고 나머지는 과제로 넘기시면 됩니다. 다만 한 번은 직접 교체해 보셔야 합니다.
+[운영 메모]
 4단계에서 시간이 모자라는 학생이 대부분이다. 수업에서 최소 5화면까지 적용시키고 나머지는 과제로. 한 번이라도 교체해 봐야 과제로 이어진다.</a:t>
             </a:r>
             <a:endParaRPr lang="en-US" dirty="0"/>
@@ -1052,7 +1084,13 @@
           <a:p>
             <a:r>
               <a:rPr lang="en-US" dirty="0"/>
-              <a:t>[운영 메모]
+              <a:t>[말할 내용]
+마지막 15분입니다. 2인 1조로 서로의 파일에서 확인하겠습니다.
+마스터 Tab Item에서 라벨 색을 한 단계 진하게 바꿔 보세요. 그리고 적용한 화면들을 넘겨 보면서 전부 바뀌었는지 봅니다. 안 바뀐 화면이 있으면 그 화면은 인스턴스가 아닌 겁니다.
+그다음 GNB 폭을 360으로 줄여서 탭이 균등하게 재분배되는지 보세요.
+오른쪽이 자주 나오는 문제들입니다. 복사한 인스턴스를 Detach 해서 연결이 끊긴 경우, Tab Item을 화면에 직접 놓아서 GNB를 안 거친 경우, 탭 폭을 Fill이 아니라 고정으로 둬서 360에서 넘치는 경우, 안전 영역 34를 안 넣어서 라벨이 화면 밖으로 나간 경우.
+확인이 끝나면 바꾼 색은 원래대로 되돌리세요. 되돌릴 때도 마스터 하나만 고치면 됩니다. 그게 오늘의 결론입니다.
+[운영 메모]
 이 검증을 수업 안에서 반드시 시킬 것. 눈으로 본 학생과 설명만 들은 학생의 3주차 작업 속도가 확연히 다르다.</a:t>
             </a:r>
             <a:endParaRPr lang="en-US" dirty="0"/>
@@ -1141,7 +1179,13 @@
           <a:p>
             <a:r>
               <a:rPr lang="en-US" dirty="0"/>
-              <a:t>[운영 메모]
+              <a:t>[말할 내용]
+제출물 체크리스트입니다. 열두 개인데 아홉 번째와 열 번째를 보세요.
+모든 화면의 하단 바가 GNB 인스턴스로 교체되었는가. 직접 그린 하단 바가 한 개도 남아 있지 않은가.
+이 둘이 오늘의 실질입니다. 컴포넌트만 만들고 화면에 적용하지 않으면 다음 주에도 낱개 화면을 고치고 계실 겁니다.
+그리고 세 번째 — 근거 칸에 '보기 좋아서'가 하나도 없어야 합니다. 네 번째 검산도 꼭 하시고요.
+3주차부터는 이 방식을 상단 헤더, 리스트, 카드로 확장합니다. 오늘 만든 게 그 출발점입니다.
+[운영 메모]
 체크리스트를 클래스룸 과제 설명에 그대로 복사해 둘 것. 특히 10번을 명시해야 실제로 교체한다.</a:t>
             </a:r>
             <a:endParaRPr lang="en-US" dirty="0"/>
@@ -1230,7 +1274,14 @@
           <a:p>
             <a:r>
               <a:rPr lang="en-US" dirty="0"/>
-              <a:t>[운영 메모]
+              <a:t>[말할 내용]
+정리하겠습니다.
+과제 세 가지입니다. GNB 규격 명세서 확정, 전 화면 인스턴스 적용, 그리고 360폭 검증.
+두 번째가 오늘의 진짜 과제입니다. 1학기에 만든 모든 화면의 하단 바를 오늘 만든 컴포넌트 인스턴스로 교체하세요. 직접 그린 하단 바가 한 개도 남으면 안 됩니다. 한 개라도 남아 있으면 다음 주에도 낱개 화면을 고치고 계실 겁니다.
+세 번째는 화면 폭 360 프레임을 하나 만들어 GNB를 붙여 보는 겁니다. 깨지는 곳이 있으면 오토레이아웃 설정을 고치세요.
+다음 주에는 나머지 공통 요소로 같은 작업을 확장합니다. 상단 헤더, 리스트, 카드요. 오늘 방식을 그대로 반복하니까 오늘 이해하고 가시는 게 중요합니다.
+질문 있으신 분?
+[운영 메모]
 2번이 오늘의 실질이다. 컴포넌트만 만들고 화면에 적용하지 않으면 다음 주에도 낱개 화면을 고치고 있게 된다. 클래스룸 과제 설명에 '직접 그린 하단 바가 남아 있으면 미제출로 본다'고 명시할 것.</a:t>
             </a:r>
             <a:endParaRPr lang="en-US" dirty="0"/>
@@ -1319,7 +1370,11 @@
           <a:p>
             <a:r>
               <a:rPr lang="en-US" dirty="0"/>
-              <a:t>[운영 메모]
+              <a:t>[말할 내용]
+오늘 세 시간은 이렇게 씁니다.
+먼저 15분, 과제로 재 오신 실측표를 함께 봅니다. 그다음 35분 강의, 35분 실습. 쉬고 나서 30분 강의, 40분 실습입니다. 마지막 15분은 검증입니다 — 만든 컴포넌트가 실제로 작동하는지 서로 확인합니다.
+오늘은 노트북을 계속 켜 두셔야 합니다. 강의 중에도 자기 파일을 열어 놓고 대조하시면 훨씬 잘 들어옵니다.
+[운영 메모]
 첫 15분 실측 공유가 오늘의 동기를 만든다. 같은 하단 바인데 학생마다 높이가 62 · 78 · 83 · 90으로 다르게 나오고, 심지어 한 사람 안에서도 화면마다 다르다. 그 표를 화면에 띄우고 시작하면 이후 설명이 필요 없다.</a:t>
             </a:r>
             <a:endParaRPr lang="en-US" dirty="0"/>
@@ -1408,7 +1463,14 @@
           <a:p>
             <a:r>
               <a:rPr lang="en-US" dirty="0"/>
-              <a:t>[운영 메모]
+              <a:t>[말할 내용]
+오늘의 목표 네 가지입니다.
+첫째, 화면 기준 폭을 하나로 고정합니다. 모든 수치가 이 하나에서 갈라져 나옵니다.
+둘째, GNB의 모든 값을 근거와 함께 말할 수 있게 됩니다. 높이가 왜 90인지 두 단계로 설명하실 수 있어야 합니다.
+셋째, Tab Item을 컴포넌트로 만듭니다.
+넷째 — 하나를 고쳐서 전 화면을 바꿉니다. 오늘 수업 마지막 15분에 직접 확인하실 겁니다.
+아래 문장이 오늘의 핵심입니다. 디자인은 자유롭게 시작하지 않습니다. 제약을 먼저 계산하고, 남는 자유도 안에서 결정합니다.
+[운영 메모]
 네 번째를 수업 끝에 실제로 시연시킬 것. 마스터 컴포넌트 색 하나를 바꿔 12개 화면이 동시에 바뀌는 것을 본인 파일에서 봐야 체득된다.</a:t>
             </a:r>
             <a:endParaRPr lang="en-US" dirty="0"/>
@@ -1497,7 +1559,11 @@
           <a:p>
             <a:r>
               <a:rPr lang="en-US" dirty="0"/>
-              <a:t>[운영 메모]
+              <a:t>[말할 내용]
+먼저 수치가 어디서 오는지 봅니다.
+하단 바의 높이는 취향이 아닙니다. 손가락 크기에서 시작해서 계산으로 내려옵니다.
+그 전에 — 과제로 재 오신 실측표를 잠깐 보겠습니다. 화면에 띄울게요. 같은 하단 바인데 62, 78, 83, 90… 다 다르시죠. 심지어 한 분 안에서도 화면마다 다릅니다. 왜 이렇게 됐을까요?
+[운영 메모]
 35분 구간. 실측표를 먼저 띄우고 '왜 다 다른가'로 시작한다. 답을 주지 말고 물어볼 것.</a:t>
             </a:r>
             <a:endParaRPr lang="en-US" dirty="0"/>
@@ -1586,7 +1652,13 @@
           <a:p>
             <a:r>
               <a:rPr lang="en-US" dirty="0"/>
-              <a:t>[운영 메모]
+              <a:t>[말할 내용]
+이 문장이 오늘 가장 중요합니다.
+"보기 좋아서 80으로 했어요"는 다음 사람이 이어 만들 수 없는 값입니다.
+값의 근거가 취향이면 그 값을 바꿀 수도, 다른 화면에 적용할 수도 없습니다. 왜냐하면 기준이 그때그때 달라지니까요.
+반대로 '터치 타깃 48을 보장하려면 콘텐츠 영역이 최소 56이고, 하단 안전 영역 34를 더해 90'이라고 말할 수 있으면, 화면이 바뀌어도 같은 논리로 다시 계산됩니다.
+수치적 접근이란 이 계산의 사슬을 끊지 않는 것입니다. 오늘 실습 내내 제가 물어볼 게 딱 하나입니다 — 이 값의 근거는요?
+[운영 메모]
 이 슬라이드를 실습 내내 화면에 띄워 둔다. 순회하며 '이 값의 근거는요?'만 물으면 된다.</a:t>
             </a:r>
             <a:endParaRPr lang="en-US" dirty="0"/>
@@ -1675,7 +1747,13 @@
           <a:p>
             <a:r>
               <a:rPr lang="en-US" dirty="0"/>
-              <a:t>[운영 메모]
+              <a:t>[말할 내용]
+첫 단계, 기준 화면을 하나로 고정합니다. 이걸 안 정하면 뒤의 모든 수치가 흔들립니다.
+이번 학기 기준은 390 곱하기 844입니다. iPhone 14 계열의 논리 해상도고 Figma 프리셋에 있습니다. 어떤 값을 고르느냐보다 하나로 고정하는 게 훨씬 중요합니다.
+검증 폭은 360으로 잡겠습니다. 안드로이드 다수 기기의 폭인데, 390에서 만든 뒤 360에 붙여 안 깨지면 대부분을 덮습니다. 오늘 과제에 들어갑니다.
+그리고 단위는 pt나 dp입니다. px가 아닙니다. @2x, @3x는 내보낼 때의 배율이에요. 설계는 논리 단위로 합니다. 실측표에 px로 적으셨다면 배율로 나눠서 다시 적으세요.
+실측표 보니까 기준 폭이 375, 390, 414로 갈리셨죠. 오늘부터 390으로 통일합니다.
+[운영 메모]
 단위 혼동(px vs pt)이 실측표에서 가장 많이 나오는 오류다. 첫 15분에 반드시 정리할 것.</a:t>
             </a:r>
             <a:endParaRPr lang="en-US" dirty="0"/>
@@ -1764,7 +1842,13 @@
           <a:p>
             <a:r>
               <a:rPr lang="en-US" dirty="0"/>
-              <a:t>[운영 메모]
+              <a:t>[말할 내용]
+높이는 세 단계로 내려옵니다. 각 단계에 근거가 있습니다.
+첫 번째는 터치 타깃입니다. 애플 가이드라인은 최소 44, 머티리얼은 48이에요. 둘 중 큰 값 48을 안전선으로 쓰겠습니다. 여기는 디자이너가 정할 수 없는 값입니다. 손가락 크기에서 온 거니까요.
+두 번째, 콘텐츠 높이 56. 48을 담고 남는 여백을 계산한 겁니다. 상단 패딩 6, 아이콘 24, 간격 4, 라벨 라인높이 14, 하단 패딩 8. 더하면 56이고 48보다 큽니다.
+세 번째, 전체 높이 90. 콘텐츠 56에 하단 안전 영역 34를 더했습니다. 34는 홈 인디케이터가 차지하는 높이예요. 이걸 비워 두지 않으면 라벨이 가려집니다. 배경은 90 전체를 채우고, 터치 요소는 위쪽 56 안에 둡니다.
+참고로 실제 iOS 탭바는 49 더하기 34로 83이고, 머티리얼은 56 더하기 24로 80입니다. 어느 쪽이든 좋습니다. 정답을 찾는 문제가 아니에요. 중요한 건 값이 계산에서 나왔고 학기 내내 같다는 점입니다.
+[운영 메모]
 '정답이 하나가 아니다'를 반드시 말할 것. 정답을 찾는 문제로 받아들이면 계산 과정을 건너뛰고 숫자만 외운다.</a:t>
             </a:r>
             <a:endParaRPr lang="en-US" dirty="0"/>
@@ -1853,7 +1937,14 @@
           <a:p>
             <a:r>
               <a:rPr lang="en-US" dirty="0"/>
-              <a:t>[운영 메모]
+              <a:t>[말할 내용]
+이걸 표로 정리하면 이렇게 됩니다. 항목, 값, 근거 세 칸이요.
+탭 폭을 보세요. 390 나누기 4는 97.5입니다. 소수점이 나오죠. 이건 잠시 뒤에 다루겠습니다.
+아이콘은 24 곱하기 24인데 실제 그림은 20 안쪽에 그리세요. 바깥 2씩을 비워야 시각적 크기가 맞습니다.
+라벨은 11pt에 라인높이 14, 한 줄 고정입니다. 한글 네 자면 약 44 폭이니 탭이 다섯 개여서 78로 줄어도 안 잘립니다.
+간격은 전부 4의 배수예요. 그 합이 콘텐츠 높이 56을 만듭니다.
+맨 아래 문장 보세요. 근거 칸에 '보기 좋아서'가 들어가는 항목이 하나라도 있으면, 그 값은 아직 정해지지 않은 겁니다.
+[운영 메모]
 이 표를 인쇄해 나눠 주고 오른쪽 값 칸을 비운 채로 실습시키면 훨씬 잘 따라온다.</a:t>
             </a:r>
             <a:endParaRPr lang="en-US" dirty="0"/>
@@ -1942,7 +2033,13 @@
           <a:p>
             <a:r>
               <a:rPr lang="en-US" dirty="0"/>
-              <a:t>[운영 메모]
+              <a:t>[말할 내용]
+아까 미뤄둔 소수점 이야기입니다. 390 나누기 4는 97.5. 딱 안 떨어지죠.
+이걸 어떻게 처리하느냐가 컴포넌트의 수준을 가릅니다.
+고정 폭으로 박으면 어떻게 되나 보세요. 98씩 네 개면 392라서 2가 삐져나옵니다. 360 화면에 붙이면 직접 다시 계산해서 네 개를 다 고쳐야 하고요. 탭을 하나 늘리면 다섯 개를 전부 다시 입력해야 합니다.
+반면 오토레이아웃에 맡기고 각 탭을 Fill container로 두면, 390에서는 97.5씩 정확히 나뉘고 360에서는 90씩으로 자동 재분배됩니다. 탭을 늘려도 알아서 78씩으로 바뀌고요.
+값을 박아 넣는 대신 규칙을 넣는 겁니다. 이게 컴포넌트화의 출발점입니다. 뒤에서 이어서 하겠습니다.
+[운영 메모]
 이 슬라이드가 PART 1과 PART 2를 잇는다. '수치를 정한다'에서 '수치가 스스로 계산되게 한다'로 넘어가는 지점.</a:t>
             </a:r>
             <a:endParaRPr lang="en-US" dirty="0"/>
